--- a/plantilla.pptx
+++ b/plantilla.pptx
@@ -6124,7 +6124,7 @@
       </p:sp>
       <p:sp>
         <p:nvSpPr>
-          <p:cNvPr id="55" name="Google Shape;55;p13"/>
+          <p:cNvPr id="55" name="var:Nombre_proceso"/>
           <p:cNvSpPr txBox="1"/>
           <p:nvPr/>
         </p:nvSpPr>
@@ -6172,7 +6172,7 @@
                 <a:cs typeface="Montserrat ExtraBold"/>
                 <a:sym typeface="Montserrat ExtraBold"/>
               </a:rPr>
-              <a:t>nombre_proceso</a:t>
+              <a:t>Nombre_proceso</a:t>
             </a:r>
             <a:r>
               <a:rPr lang="es-VE" sz="6620" dirty="0">
@@ -6250,7 +6250,7 @@
       </p:pic>
       <p:sp>
         <p:nvSpPr>
-          <p:cNvPr id="58" name="Google Shape;58;p13"/>
+          <p:cNvPr id="58" name="var:Fecha_vigencia"/>
           <p:cNvSpPr txBox="1"/>
           <p:nvPr/>
         </p:nvSpPr>
@@ -6286,7 +6286,7 @@
               <a:buNone/>
             </a:pPr>
             <a:r>
-              <a:rPr lang="es-VE" sz="2388">
+              <a:rPr lang="es-VE" sz="2388" dirty="0">
                 <a:solidFill>
                   <a:srgbClr val="4E4F51"/>
                 </a:solidFill>
@@ -6295,19 +6295,7 @@
                 <a:cs typeface="Poppins SemiBold"/>
                 <a:sym typeface="Poppins SemiBold"/>
               </a:rPr>
-              <a:t>{{f</a:t>
-            </a:r>
-            <a:r>
-              <a:rPr lang="en" sz="2388">
-                <a:solidFill>
-                  <a:srgbClr val="4E4F51"/>
-                </a:solidFill>
-                <a:latin typeface="Poppins SemiBold"/>
-                <a:ea typeface="Poppins SemiBold"/>
-                <a:cs typeface="Poppins SemiBold"/>
-                <a:sym typeface="Poppins SemiBold"/>
-              </a:rPr>
-              <a:t>echa</a:t>
+              <a:t>{{F</a:t>
             </a:r>
             <a:r>
               <a:rPr lang="en" sz="2388" dirty="0">
@@ -6319,7 +6307,7 @@
                 <a:cs typeface="Poppins SemiBold"/>
                 <a:sym typeface="Poppins SemiBold"/>
               </a:rPr>
-              <a:t>_vigencia}}</a:t>
+              <a:t>echa_vigencia}}</a:t>
             </a:r>
             <a:endParaRPr sz="2388" dirty="0">
               <a:solidFill>
@@ -6335,7 +6323,7 @@
       </p:sp>
       <p:sp>
         <p:nvSpPr>
-          <p:cNvPr id="59" name="Google Shape;59;p13"/>
+          <p:cNvPr id="59" name="var:codigo"/>
           <p:cNvSpPr txBox="1"/>
           <p:nvPr/>
         </p:nvSpPr>
@@ -6425,7 +6413,7 @@
       </p:sp>
       <p:sp>
         <p:nvSpPr>
-          <p:cNvPr id="60" name="Google Shape;60;p13"/>
+          <p:cNvPr id="60" name="var:revisión"/>
           <p:cNvSpPr txBox="1"/>
           <p:nvPr/>
         </p:nvSpPr>
@@ -6473,18 +6461,6 @@
               <a:t>{{</a:t>
             </a:r>
             <a:r>
-              <a:rPr lang="es-VE" sz="2388" dirty="0" err="1">
-                <a:solidFill>
-                  <a:srgbClr val="4E4F51"/>
-                </a:solidFill>
-                <a:latin typeface="Poppins SemiBold"/>
-                <a:ea typeface="Poppins SemiBold"/>
-                <a:cs typeface="Poppins SemiBold"/>
-                <a:sym typeface="Poppins SemiBold"/>
-              </a:rPr>
-              <a:t>revision</a:t>
-            </a:r>
-            <a:r>
               <a:rPr lang="es-VE" sz="2388" dirty="0">
                 <a:solidFill>
                   <a:srgbClr val="4E4F51"/>
@@ -6494,7 +6470,7 @@
                 <a:cs typeface="Poppins SemiBold"/>
                 <a:sym typeface="Poppins SemiBold"/>
               </a:rPr>
-              <a:t>}}</a:t>
+              <a:t>revisión}}</a:t>
             </a:r>
             <a:endParaRPr sz="2388" dirty="0">
               <a:solidFill>
@@ -6664,7 +6640,7 @@
       </p:sp>
       <p:sp>
         <p:nvSpPr>
-          <p:cNvPr id="64" name="Google Shape;64;p13"/>
+          <p:cNvPr id="64" name="var:objetivo"/>
           <p:cNvSpPr txBox="1"/>
           <p:nvPr/>
         </p:nvSpPr>
@@ -6847,7 +6823,7 @@
       </p:sp>
       <p:sp>
         <p:nvSpPr>
-          <p:cNvPr id="67" name="Google Shape;67;p13"/>
+          <p:cNvPr id="67" name="var:norma_1"/>
           <p:cNvSpPr txBox="1"/>
           <p:nvPr/>
         </p:nvSpPr>
@@ -6908,7 +6884,7 @@
       </p:sp>
       <p:sp>
         <p:nvSpPr>
-          <p:cNvPr id="68" name="Google Shape;68;p13"/>
+          <p:cNvPr id="68" name="var:norma_1"/>
           <p:cNvSpPr/>
           <p:nvPr/>
         </p:nvSpPr>
@@ -6948,7 +6924,7 @@
       </p:sp>
       <p:sp>
         <p:nvSpPr>
-          <p:cNvPr id="69" name="Google Shape;69;p13"/>
+          <p:cNvPr id="69" name="var:norma_2"/>
           <p:cNvSpPr txBox="1"/>
           <p:nvPr/>
         </p:nvSpPr>
@@ -7009,7 +6985,7 @@
       </p:sp>
       <p:sp>
         <p:nvSpPr>
-          <p:cNvPr id="70" name="Google Shape;70;p13"/>
+          <p:cNvPr id="70" name="var:norma_2"/>
           <p:cNvSpPr/>
           <p:nvPr/>
         </p:nvSpPr>
@@ -7049,7 +7025,7 @@
       </p:sp>
       <p:sp>
         <p:nvSpPr>
-          <p:cNvPr id="71" name="Google Shape;71;p13"/>
+          <p:cNvPr id="71" name="var:norma_3"/>
           <p:cNvSpPr txBox="1"/>
           <p:nvPr/>
         </p:nvSpPr>
@@ -7110,7 +7086,7 @@
       </p:sp>
       <p:sp>
         <p:nvSpPr>
-          <p:cNvPr id="72" name="Google Shape;72;p13"/>
+          <p:cNvPr id="72" name="var:norma_3"/>
           <p:cNvSpPr/>
           <p:nvPr/>
         </p:nvSpPr>
@@ -7259,7 +7235,7 @@
       </p:sp>
       <p:sp>
         <p:nvSpPr>
-          <p:cNvPr id="75" name="Google Shape;75;p13"/>
+          <p:cNvPr id="75" name="var:responsable_1"/>
           <p:cNvSpPr txBox="1"/>
           <p:nvPr/>
         </p:nvSpPr>
@@ -7332,7 +7308,7 @@
       </p:sp>
       <p:sp>
         <p:nvSpPr>
-          <p:cNvPr id="76" name="Google Shape;76;p13"/>
+          <p:cNvPr id="76" name="var:responsable_1"/>
           <p:cNvSpPr/>
           <p:nvPr/>
         </p:nvSpPr>
@@ -7372,7 +7348,7 @@
       </p:sp>
       <p:sp>
         <p:nvSpPr>
-          <p:cNvPr id="77" name="Google Shape;77;p13"/>
+          <p:cNvPr id="77" name="var:responsable_2"/>
           <p:cNvSpPr txBox="1"/>
           <p:nvPr/>
         </p:nvSpPr>
@@ -7445,7 +7421,7 @@
       </p:sp>
       <p:sp>
         <p:nvSpPr>
-          <p:cNvPr id="78" name="Google Shape;78;p13"/>
+          <p:cNvPr id="78" name="var:responsable_2"/>
           <p:cNvSpPr/>
           <p:nvPr/>
         </p:nvSpPr>
@@ -7485,7 +7461,7 @@
       </p:sp>
       <p:sp>
         <p:nvSpPr>
-          <p:cNvPr id="79" name="Google Shape;79;p13"/>
+          <p:cNvPr id="79" name="var:material_1"/>
           <p:cNvSpPr/>
           <p:nvPr/>
         </p:nvSpPr>
@@ -7655,7 +7631,7 @@
       </p:sp>
       <p:sp>
         <p:nvSpPr>
-          <p:cNvPr id="82" name="Google Shape;82;p13"/>
+          <p:cNvPr id="82" name="var:material_1"/>
           <p:cNvSpPr txBox="1"/>
           <p:nvPr/>
         </p:nvSpPr>
@@ -7728,7 +7704,7 @@
       </p:sp>
       <p:sp>
         <p:nvSpPr>
-          <p:cNvPr id="83" name="Google Shape;83;p13"/>
+          <p:cNvPr id="83" name="var:material_1"/>
           <p:cNvSpPr/>
           <p:nvPr/>
         </p:nvSpPr>
@@ -7768,7 +7744,7 @@
       </p:sp>
       <p:sp>
         <p:nvSpPr>
-          <p:cNvPr id="84" name="Google Shape;84;p13"/>
+          <p:cNvPr id="84" name="var:material-2"/>
           <p:cNvSpPr txBox="1"/>
           <p:nvPr/>
         </p:nvSpPr>
@@ -7825,7 +7801,7 @@
                 <a:cs typeface="Poppins SemiBold"/>
                 <a:sym typeface="Poppins SemiBold"/>
               </a:rPr>
-              <a:t>material_2}}</a:t>
+              <a:t>material-2}}</a:t>
             </a:r>
             <a:endParaRPr sz="3120" dirty="0">
               <a:solidFill>
@@ -7841,7 +7817,7 @@
       </p:sp>
       <p:sp>
         <p:nvSpPr>
-          <p:cNvPr id="85" name="Google Shape;85;p13"/>
+          <p:cNvPr id="85" name="var:material_1"/>
           <p:cNvSpPr/>
           <p:nvPr/>
         </p:nvSpPr>
@@ -7942,7 +7918,7 @@
       </p:sp>
       <p:sp>
         <p:nvSpPr>
-          <p:cNvPr id="87" name="Google Shape;87;p13"/>
+          <p:cNvPr id="87" name="var:equipo_1"/>
           <p:cNvSpPr txBox="1"/>
           <p:nvPr/>
         </p:nvSpPr>
@@ -8015,7 +7991,7 @@
       </p:sp>
       <p:sp>
         <p:nvSpPr>
-          <p:cNvPr id="88" name="Google Shape;88;p13"/>
+          <p:cNvPr id="88" name="var:material_1"/>
           <p:cNvSpPr/>
           <p:nvPr/>
         </p:nvSpPr>
@@ -8055,7 +8031,7 @@
       </p:sp>
       <p:sp>
         <p:nvSpPr>
-          <p:cNvPr id="89" name="Google Shape;89;p13"/>
+          <p:cNvPr id="89" name="var:equipo_2"/>
           <p:cNvSpPr txBox="1"/>
           <p:nvPr/>
         </p:nvSpPr>
@@ -8128,7 +8104,7 @@
       </p:sp>
       <p:sp>
         <p:nvSpPr>
-          <p:cNvPr id="90" name="Google Shape;90;p13"/>
+          <p:cNvPr id="90" name="var:equipo_2"/>
           <p:cNvSpPr/>
           <p:nvPr/>
         </p:nvSpPr>
@@ -8168,7 +8144,7 @@
       </p:sp>
       <p:sp>
         <p:nvSpPr>
-          <p:cNvPr id="91" name="Google Shape;91;p13"/>
+          <p:cNvPr id="91" name="var:Tip_2"/>
           <p:cNvSpPr/>
           <p:nvPr/>
         </p:nvSpPr>
@@ -8277,7 +8253,7 @@
       </p:sp>
       <p:sp>
         <p:nvSpPr>
-          <p:cNvPr id="93" name="Google Shape;93;p13"/>
+          <p:cNvPr id="93" name="var:tip_1"/>
           <p:cNvSpPr txBox="1"/>
           <p:nvPr/>
         </p:nvSpPr>
@@ -8338,7 +8314,7 @@
       </p:sp>
       <p:sp>
         <p:nvSpPr>
-          <p:cNvPr id="94" name="Google Shape;94;p13"/>
+          <p:cNvPr id="94" name="var:tip_1"/>
           <p:cNvSpPr/>
           <p:nvPr/>
         </p:nvSpPr>
@@ -8378,7 +8354,7 @@
       </p:sp>
       <p:sp>
         <p:nvSpPr>
-          <p:cNvPr id="95" name="Google Shape;95;p13"/>
+          <p:cNvPr id="95" name="var:Tip_2"/>
           <p:cNvSpPr txBox="1"/>
           <p:nvPr/>
         </p:nvSpPr>
@@ -8413,18 +8389,6 @@
               </a:spcAft>
               <a:buNone/>
             </a:pPr>
-            <a:r>
-              <a:rPr lang="es-VE" sz="3120">
-                <a:solidFill>
-                  <a:schemeClr val="dk2"/>
-                </a:solidFill>
-                <a:latin typeface="Poppins SemiBold"/>
-                <a:ea typeface="Poppins SemiBold"/>
-                <a:cs typeface="Poppins SemiBold"/>
-                <a:sym typeface="Poppins SemiBold"/>
-              </a:rPr>
-              <a:t>{{tip</a:t>
-            </a:r>
             <a:r>
               <a:rPr lang="es-VE" sz="3120" dirty="0">
                 <a:solidFill>
@@ -8435,7 +8399,7 @@
                 <a:cs typeface="Poppins SemiBold"/>
                 <a:sym typeface="Poppins SemiBold"/>
               </a:rPr>
-              <a:t>_2}}</a:t>
+              <a:t>{{Tip_2}}</a:t>
             </a:r>
             <a:endParaRPr sz="3120" dirty="0">
               <a:solidFill>
@@ -8451,7 +8415,7 @@
       </p:sp>
       <p:sp>
         <p:nvSpPr>
-          <p:cNvPr id="96" name="Google Shape;96;p13"/>
+          <p:cNvPr id="96" name="var:tip_3"/>
           <p:cNvSpPr/>
           <p:nvPr/>
         </p:nvSpPr>
@@ -8491,7 +8455,7 @@
       </p:sp>
       <p:sp>
         <p:nvSpPr>
-          <p:cNvPr id="97" name="Google Shape;97;p13"/>
+          <p:cNvPr id="97" name="var:tip_3"/>
           <p:cNvSpPr txBox="1"/>
           <p:nvPr/>
         </p:nvSpPr>
@@ -8564,7 +8528,7 @@
       </p:sp>
       <p:sp>
         <p:nvSpPr>
-          <p:cNvPr id="98" name="Google Shape;98;p13"/>
+          <p:cNvPr id="98" name="var:tip_3"/>
           <p:cNvSpPr/>
           <p:nvPr/>
         </p:nvSpPr>
@@ -8729,7 +8693,7 @@
       </p:sp>
       <p:sp>
         <p:nvSpPr>
-          <p:cNvPr id="49" name="Google Shape;59;p13">
+          <p:cNvPr id="49" name="var:tiempo_ejecucion">
             <a:extLst>
               <a:ext uri="{FF2B5EF4-FFF2-40B4-BE49-F238E27FC236}">
                 <a16:creationId xmlns:a16="http://schemas.microsoft.com/office/drawing/2014/main" id="{49D06808-E569-47F6-9328-721440970DAE}"/>
@@ -8858,7 +8822,7 @@
       </p:grpSpPr>
       <p:sp>
         <p:nvSpPr>
-          <p:cNvPr id="103" name="Google Shape;103;p14"/>
+          <p:cNvPr id="103" name="var:descripcion_paso_2"/>
           <p:cNvSpPr/>
           <p:nvPr/>
         </p:nvSpPr>
@@ -8904,7 +8868,7 @@
       </p:sp>
       <p:sp>
         <p:nvSpPr>
-          <p:cNvPr id="104" name="Google Shape;104;p14"/>
+          <p:cNvPr id="104" name="var:descripcion_paso_1"/>
           <p:cNvSpPr/>
           <p:nvPr/>
         </p:nvSpPr>
@@ -9059,7 +9023,7 @@
       </p:sp>
       <p:sp>
         <p:nvSpPr>
-          <p:cNvPr id="107" name="Google Shape;107;p14"/>
+          <p:cNvPr id="107" name="var:titulo_conocimiento_1"/>
           <p:cNvSpPr/>
           <p:nvPr/>
         </p:nvSpPr>
@@ -9099,7 +9063,7 @@
       </p:sp>
       <p:sp>
         <p:nvSpPr>
-          <p:cNvPr id="108" name="Google Shape;108;p14"/>
+          <p:cNvPr id="108" name="var:titulo_conocimiento_1"/>
           <p:cNvSpPr txBox="1"/>
           <p:nvPr/>
         </p:nvSpPr>
@@ -9172,7 +9136,7 @@
       </p:sp>
       <p:sp>
         <p:nvSpPr>
-          <p:cNvPr id="109" name="Google Shape;109;p14"/>
+          <p:cNvPr id="109" name="var:texto_conocimiento_1"/>
           <p:cNvSpPr txBox="1"/>
           <p:nvPr/>
         </p:nvSpPr>
@@ -9245,7 +9209,7 @@
       </p:sp>
       <p:sp>
         <p:nvSpPr>
-          <p:cNvPr id="110" name="Google Shape;110;p14"/>
+          <p:cNvPr id="110" name="var:titulo_conocimiento_2"/>
           <p:cNvSpPr/>
           <p:nvPr/>
         </p:nvSpPr>
@@ -9285,7 +9249,7 @@
       </p:sp>
       <p:sp>
         <p:nvSpPr>
-          <p:cNvPr id="111" name="Google Shape;111;p14"/>
+          <p:cNvPr id="111" name="var:titulo_conocimiento_2"/>
           <p:cNvSpPr txBox="1"/>
           <p:nvPr/>
         </p:nvSpPr>
@@ -9358,7 +9322,7 @@
       </p:sp>
       <p:sp>
         <p:nvSpPr>
-          <p:cNvPr id="112" name="Google Shape;112;p14"/>
+          <p:cNvPr id="112" name="var:texto_conocimiento_2"/>
           <p:cNvSpPr txBox="1"/>
           <p:nvPr/>
         </p:nvSpPr>
@@ -9431,7 +9395,7 @@
       </p:sp>
       <p:sp>
         <p:nvSpPr>
-          <p:cNvPr id="113" name="Google Shape;113;p14"/>
+          <p:cNvPr id="113" name="var:titulo_conocimiento_3"/>
           <p:cNvSpPr/>
           <p:nvPr/>
         </p:nvSpPr>
@@ -9471,7 +9435,7 @@
       </p:sp>
       <p:sp>
         <p:nvSpPr>
-          <p:cNvPr id="114" name="Google Shape;114;p14"/>
+          <p:cNvPr id="114" name="var:titulo_conocimiento_3"/>
           <p:cNvSpPr txBox="1"/>
           <p:nvPr/>
         </p:nvSpPr>
@@ -9532,7 +9496,7 @@
       </p:sp>
       <p:sp>
         <p:nvSpPr>
-          <p:cNvPr id="115" name="Google Shape;115;p14"/>
+          <p:cNvPr id="115" name="var:texto_conocimiento_3"/>
           <p:cNvSpPr txBox="1"/>
           <p:nvPr/>
         </p:nvSpPr>
@@ -9775,7 +9739,7 @@
       </p:sp>
       <p:sp>
         <p:nvSpPr>
-          <p:cNvPr id="120" name="Google Shape;120;p14"/>
+          <p:cNvPr id="120" name="var:contexto_operativo"/>
           <p:cNvSpPr txBox="1"/>
           <p:nvPr/>
         </p:nvSpPr>
@@ -9905,7 +9869,7 @@
       </p:sp>
       <p:pic>
         <p:nvPicPr>
-          <p:cNvPr id="122" name="Google Shape;122;p14" title="paso.png"/>
+          <p:cNvPr id="122" name="var:descripcion_paso_1" title="paso.png"/>
           <p:cNvPicPr preferRelativeResize="0"/>
           <p:nvPr/>
         </p:nvPicPr>
@@ -9933,7 +9897,7 @@
       </p:pic>
       <p:sp>
         <p:nvSpPr>
-          <p:cNvPr id="123" name="Google Shape;123;p14"/>
+          <p:cNvPr id="123" name="var:descripcion_paso_1"/>
           <p:cNvSpPr txBox="1"/>
           <p:nvPr/>
         </p:nvSpPr>
@@ -9991,7 +9955,7 @@
       </p:sp>
       <p:pic>
         <p:nvPicPr>
-          <p:cNvPr id="124" name="Google Shape;124;p14" title="paso.png"/>
+          <p:cNvPr id="124" name="var:descripcion_paso_2" title="paso.png"/>
           <p:cNvPicPr preferRelativeResize="0"/>
           <p:nvPr/>
         </p:nvPicPr>
@@ -10019,7 +9983,7 @@
       </p:pic>
       <p:sp>
         <p:nvSpPr>
-          <p:cNvPr id="125" name="Google Shape;125;p14"/>
+          <p:cNvPr id="125" name="var:descripcion_paso_2"/>
           <p:cNvSpPr txBox="1"/>
           <p:nvPr/>
         </p:nvSpPr>
@@ -10077,7 +10041,7 @@
       </p:sp>
       <p:sp>
         <p:nvSpPr>
-          <p:cNvPr id="126" name="Google Shape;126;p14"/>
+          <p:cNvPr id="126" name="var:descripcion_paso_1"/>
           <p:cNvSpPr txBox="1"/>
           <p:nvPr/>
         </p:nvSpPr>
@@ -10138,7 +10102,7 @@
       </p:sp>
       <p:sp>
         <p:nvSpPr>
-          <p:cNvPr id="127" name="Google Shape;127;p14"/>
+          <p:cNvPr id="127" name="var:descripcion_paso_2"/>
           <p:cNvSpPr txBox="1"/>
           <p:nvPr/>
         </p:nvSpPr>
@@ -10199,7 +10163,7 @@
       </p:sp>
       <p:sp>
         <p:nvSpPr>
-          <p:cNvPr id="128" name="Google Shape;128;p14"/>
+          <p:cNvPr id="128" name="var:descripcion_paso_1"/>
           <p:cNvSpPr/>
           <p:nvPr/>
         </p:nvSpPr>
@@ -10267,7 +10231,7 @@
       </p:sp>
       <p:sp>
         <p:nvSpPr>
-          <p:cNvPr id="129" name="Google Shape;129;p14"/>
+          <p:cNvPr id="129" name="var:descripcion_paso_1"/>
           <p:cNvSpPr/>
           <p:nvPr/>
         </p:nvSpPr>
@@ -10335,7 +10299,7 @@
       </p:sp>
       <p:sp>
         <p:nvSpPr>
-          <p:cNvPr id="130" name="Google Shape;130;p14"/>
+          <p:cNvPr id="130" name="var:descripcion_paso_2"/>
           <p:cNvSpPr/>
           <p:nvPr/>
         </p:nvSpPr>
@@ -10436,7 +10400,7 @@
       </p:grpSpPr>
       <p:sp>
         <p:nvSpPr>
-          <p:cNvPr id="135" name="Google Shape;135;p15"/>
+          <p:cNvPr id="135" name="var:descripcion_paso_4"/>
           <p:cNvSpPr/>
           <p:nvPr/>
         </p:nvSpPr>
@@ -10482,7 +10446,7 @@
       </p:sp>
       <p:sp>
         <p:nvSpPr>
-          <p:cNvPr id="136" name="Google Shape;136;p15"/>
+          <p:cNvPr id="136" name="var:descripcion_paso_3"/>
           <p:cNvSpPr/>
           <p:nvPr/>
         </p:nvSpPr>
@@ -10568,7 +10532,7 @@
       </p:sp>
       <p:pic>
         <p:nvPicPr>
-          <p:cNvPr id="138" name="Google Shape;138;p15" title="paso.png"/>
+          <p:cNvPr id="138" name="var:descripcion_paso_3" title="paso.png"/>
           <p:cNvPicPr preferRelativeResize="0"/>
           <p:nvPr/>
         </p:nvPicPr>
@@ -10596,7 +10560,7 @@
       </p:pic>
       <p:sp>
         <p:nvSpPr>
-          <p:cNvPr id="139" name="Google Shape;139;p15"/>
+          <p:cNvPr id="139" name="var:descripcion_paso_3"/>
           <p:cNvSpPr txBox="1"/>
           <p:nvPr/>
         </p:nvSpPr>
@@ -10654,7 +10618,7 @@
       </p:sp>
       <p:pic>
         <p:nvPicPr>
-          <p:cNvPr id="140" name="Google Shape;140;p15" title="paso.png"/>
+          <p:cNvPr id="140" name="var:descripcion_paso_4" title="paso.png"/>
           <p:cNvPicPr preferRelativeResize="0"/>
           <p:nvPr/>
         </p:nvPicPr>
@@ -10682,7 +10646,7 @@
       </p:pic>
       <p:sp>
         <p:nvSpPr>
-          <p:cNvPr id="141" name="Google Shape;141;p15"/>
+          <p:cNvPr id="141" name="var:descripcion_paso_4"/>
           <p:cNvSpPr txBox="1"/>
           <p:nvPr/>
         </p:nvSpPr>
@@ -10740,7 +10704,7 @@
       </p:sp>
       <p:sp>
         <p:nvSpPr>
-          <p:cNvPr id="142" name="Google Shape;142;p15"/>
+          <p:cNvPr id="142" name="var:descripcion_paso_3"/>
           <p:cNvSpPr txBox="1"/>
           <p:nvPr/>
         </p:nvSpPr>
@@ -10806,7 +10770,7 @@
       </p:sp>
       <p:sp>
         <p:nvSpPr>
-          <p:cNvPr id="143" name="Google Shape;143;p15"/>
+          <p:cNvPr id="143" name="var:descripcion_paso_4"/>
           <p:cNvSpPr txBox="1"/>
           <p:nvPr/>
         </p:nvSpPr>
@@ -10867,7 +10831,7 @@
       </p:sp>
       <p:sp>
         <p:nvSpPr>
-          <p:cNvPr id="144" name="Google Shape;144;p15"/>
+          <p:cNvPr id="144" name="var:descripcion_paso_6"/>
           <p:cNvSpPr/>
           <p:nvPr/>
         </p:nvSpPr>
@@ -10913,7 +10877,7 @@
       </p:sp>
       <p:sp>
         <p:nvSpPr>
-          <p:cNvPr id="145" name="Google Shape;145;p15"/>
+          <p:cNvPr id="145" name="var:descripcion_paso_5"/>
           <p:cNvSpPr/>
           <p:nvPr/>
         </p:nvSpPr>
@@ -10959,7 +10923,7 @@
       </p:sp>
       <p:pic>
         <p:nvPicPr>
-          <p:cNvPr id="146" name="Google Shape;146;p15" title="paso.png"/>
+          <p:cNvPr id="146" name="var:descripcion_paso_5" title="paso.png"/>
           <p:cNvPicPr preferRelativeResize="0"/>
           <p:nvPr/>
         </p:nvPicPr>
@@ -10987,7 +10951,7 @@
       </p:pic>
       <p:sp>
         <p:nvSpPr>
-          <p:cNvPr id="147" name="Google Shape;147;p15"/>
+          <p:cNvPr id="147" name="var:descripcion_paso_5"/>
           <p:cNvSpPr txBox="1"/>
           <p:nvPr/>
         </p:nvSpPr>
@@ -11045,7 +11009,7 @@
       </p:sp>
       <p:pic>
         <p:nvPicPr>
-          <p:cNvPr id="148" name="Google Shape;148;p15" title="paso.png"/>
+          <p:cNvPr id="148" name="var:descripcion_paso_6" title="paso.png"/>
           <p:cNvPicPr preferRelativeResize="0"/>
           <p:nvPr/>
         </p:nvPicPr>
@@ -11073,7 +11037,7 @@
       </p:pic>
       <p:sp>
         <p:nvSpPr>
-          <p:cNvPr id="149" name="Google Shape;149;p15"/>
+          <p:cNvPr id="149" name="var:descripcion_paso_6"/>
           <p:cNvSpPr txBox="1"/>
           <p:nvPr/>
         </p:nvSpPr>
@@ -11131,7 +11095,7 @@
       </p:sp>
       <p:sp>
         <p:nvSpPr>
-          <p:cNvPr id="150" name="Google Shape;150;p15"/>
+          <p:cNvPr id="150" name="var:descripcion_paso_5"/>
           <p:cNvSpPr txBox="1"/>
           <p:nvPr/>
         </p:nvSpPr>
@@ -11192,7 +11156,7 @@
       </p:sp>
       <p:sp>
         <p:nvSpPr>
-          <p:cNvPr id="151" name="Google Shape;151;p15"/>
+          <p:cNvPr id="151" name="var:descripcion_paso_6"/>
           <p:cNvSpPr txBox="1"/>
           <p:nvPr/>
         </p:nvSpPr>
@@ -11258,7 +11222,7 @@
       </p:sp>
       <p:sp>
         <p:nvSpPr>
-          <p:cNvPr id="152" name="Google Shape;152;p15"/>
+          <p:cNvPr id="152" name="var:descripcion_paso_7"/>
           <p:cNvSpPr/>
           <p:nvPr/>
         </p:nvSpPr>
@@ -11304,7 +11268,7 @@
       </p:sp>
       <p:pic>
         <p:nvPicPr>
-          <p:cNvPr id="153" name="Google Shape;153;p15" title="paso.png"/>
+          <p:cNvPr id="153" name="var:descripcion_paso_7" title="paso.png"/>
           <p:cNvPicPr preferRelativeResize="0"/>
           <p:nvPr/>
         </p:nvPicPr>
@@ -11332,7 +11296,7 @@
       </p:pic>
       <p:sp>
         <p:nvSpPr>
-          <p:cNvPr id="154" name="Google Shape;154;p15"/>
+          <p:cNvPr id="154" name="var:descripcion_paso_7"/>
           <p:cNvSpPr txBox="1"/>
           <p:nvPr/>
         </p:nvSpPr>
@@ -11390,7 +11354,7 @@
       </p:sp>
       <p:sp>
         <p:nvSpPr>
-          <p:cNvPr id="155" name="Google Shape;155;p15"/>
+          <p:cNvPr id="155" name="var:descripcion_paso_7"/>
           <p:cNvSpPr txBox="1"/>
           <p:nvPr/>
         </p:nvSpPr>
@@ -11456,7 +11420,7 @@
       </p:sp>
       <p:sp>
         <p:nvSpPr>
-          <p:cNvPr id="156" name="Google Shape;156;p15"/>
+          <p:cNvPr id="156" name="var:descripcion_paso_3"/>
           <p:cNvSpPr/>
           <p:nvPr/>
         </p:nvSpPr>
@@ -11524,7 +11488,7 @@
       </p:sp>
       <p:sp>
         <p:nvSpPr>
-          <p:cNvPr id="157" name="Google Shape;157;p15"/>
+          <p:cNvPr id="157" name="var:descripcion_paso_3"/>
           <p:cNvSpPr/>
           <p:nvPr/>
         </p:nvSpPr>
@@ -11592,7 +11556,7 @@
       </p:sp>
       <p:sp>
         <p:nvSpPr>
-          <p:cNvPr id="158" name="Google Shape;158;p15"/>
+          <p:cNvPr id="158" name="var:descripcion_paso_3"/>
           <p:cNvSpPr/>
           <p:nvPr/>
         </p:nvSpPr>
@@ -11660,7 +11624,7 @@
       </p:sp>
       <p:sp>
         <p:nvSpPr>
-          <p:cNvPr id="159" name="Google Shape;159;p15"/>
+          <p:cNvPr id="159" name="var:descripcion_paso_4"/>
           <p:cNvSpPr/>
           <p:nvPr/>
         </p:nvSpPr>
@@ -11728,7 +11692,7 @@
       </p:sp>
       <p:sp>
         <p:nvSpPr>
-          <p:cNvPr id="160" name="Google Shape;160;p15"/>
+          <p:cNvPr id="160" name="var:descripcion_paso_5"/>
           <p:cNvSpPr/>
           <p:nvPr/>
         </p:nvSpPr>
@@ -11796,7 +11760,7 @@
       </p:sp>
       <p:sp>
         <p:nvSpPr>
-          <p:cNvPr id="161" name="Google Shape;161;p15"/>
+          <p:cNvPr id="161" name="var:descripcion_paso_6"/>
           <p:cNvSpPr/>
           <p:nvPr/>
         </p:nvSpPr>
@@ -11864,7 +11828,7 @@
       </p:sp>
       <p:sp>
         <p:nvSpPr>
-          <p:cNvPr id="162" name="Google Shape;162;p15"/>
+          <p:cNvPr id="162" name="var:descripcion_paso_7"/>
           <p:cNvSpPr/>
           <p:nvPr/>
         </p:nvSpPr>
